--- a/docs/Executive_Overview.pptx
+++ b/docs/Executive_Overview.pptx
@@ -211,9 +211,9 @@
           </c:dLbls>
           <c:cat>
             <c:multiLvlStrRef>
-              <c:f>Sheet1!$A$2:$A$8</c:f>
+              <c:f>Sheet1!$A$2:$A$9</c:f>
               <c:multiLvlStrCache>
-                <c:ptCount val="7"/>
+                <c:ptCount val="8"/>
                 <c:lvl>
                   <c:pt idx="0">
                     <c:v>Project suites</c:v>
@@ -228,12 +228,15 @@
                     <c:v>Informatica (SQL)</c:v>
                   </c:pt>
                   <c:pt idx="4">
-                    <c:v>migkit (unit)</c:v>
+                    <c:v>migkit + governance (unit)</c:v>
                   </c:pt>
                   <c:pt idx="5">
                     <c:v>Informatica tool (unit)</c:v>
                   </c:pt>
                   <c:pt idx="6">
+                    <c:v>Assessment · Redshift · Iceberg · schema · change (unit)</c:v>
+                  </c:pt>
+                  <c:pt idx="7">
                     <c:v>Agent hooks</c:v>
                   </c:pt>
                 </c:lvl>
@@ -242,10 +245,10 @@
           </c:cat>
           <c:val>
             <c:numRef>
-              <c:f>Sheet1!$B$2:$B$8</c:f>
+              <c:f>Sheet1!$B$2:$B$9</c:f>
               <c:numCache>
                 <c:formatCode>General</c:formatCode>
-                <c:ptCount val="7"/>
+                <c:ptCount val="8"/>
                 <c:pt idx="0">
                   <c:v>153</c:v>
                 </c:pt>
@@ -259,13 +262,16 @@
                   <c:v>38</c:v>
                 </c:pt>
                 <c:pt idx="4">
-                  <c:v>33</c:v>
+                  <c:v>41</c:v>
                 </c:pt>
                 <c:pt idx="5">
                   <c:v>27</c:v>
                 </c:pt>
                 <c:pt idx="6">
-                  <c:v>15</c:v>
+                  <c:v>52</c:v>
+                </c:pt>
+                <c:pt idx="7">
+                  <c:v>18</c:v>
                 </c:pt>
               </c:numCache>
             </c:numRef>
@@ -1339,7 +1345,7 @@
           <a:p>
             <a:r>
               <a:rPr lang="en-US" dirty="0"/>
-              <a:t>Next: schema mismatch detection and schema change tracking make the conversion safe while source and target keep evolving; metadata and data validation prove the data, not only the code. Later: new target platforms (Oracle, Amazon Redshift) for both stored procedures and Informatica ETL; each is a new steering file + skill + examples + tests on the same engine and guardrails.</a:t>
+              <a:t>Delivered in September 2026: five new skills (assessment, Redshift, Iceberg, schema conformance, change propagation) and a governance layer shared by all eight. Next: data validation proves the data, not only the code; serving paths for BI. AI-DLC: the kit already produces reviewable packages per unit of work; integrating with the AI-Driven Development Lifecycle is planned as steering plus an adapter, no code yet. Later: Oracle targets and Informatica ETL to Redshift/Oracle on the same engine and guardrails.</a:t>
             </a:r>
             <a:endParaRPr lang="en-US" dirty="0"/>
           </a:p>
@@ -7946,7 +7952,7 @@
                 <a:ea typeface="Cambria" pitchFamily="34" charset="-122"/>
                 <a:cs typeface="Cambria" pitchFamily="34" charset="-120"/>
               </a:rPr>
-              <a:t>Proof: 611 automated checks, one gate</a:t>
+              <a:t>Proof: 674 automated checks, one gate</a:t>
             </a:r>
             <a:endParaRPr lang="en-US" sz="3200" dirty="0"/>
           </a:p>
@@ -8267,7 +8273,7 @@
                 <a:ea typeface="Calibri" pitchFamily="34" charset="-122"/>
                 <a:cs typeface="Calibri" pitchFamily="34" charset="-120"/>
               </a:rPr>
-              <a:t>RQ · RP</a:t>
+              <a:t>RQ · RP · IC</a:t>
             </a:r>
             <a:endParaRPr lang="en-US" sz="1300" dirty="0"/>
           </a:p>
@@ -8284,7 +8290,7 @@
                 <a:ea typeface="Calibri" pitchFamily="34" charset="-122"/>
                 <a:cs typeface="Calibri" pitchFamily="34" charset="-120"/>
               </a:rPr>
-              <a:t>23 rules · 15 patterns</a:t>
+              <a:t>23 rules · 15 patterns · 42 cases</a:t>
             </a:r>
             <a:endParaRPr lang="en-US" sz="1300" dirty="0"/>
           </a:p>
@@ -8389,7 +8395,7 @@
                 <a:ea typeface="Calibri" pitchFamily="34" charset="-122"/>
                 <a:cs typeface="Calibri" pitchFamily="34" charset="-120"/>
               </a:rPr>
-              <a:t>IC</a:t>
+              <a:t>SEC · LOG · SVC · GOV</a:t>
             </a:r>
             <a:endParaRPr lang="en-US" sz="1300" dirty="0"/>
           </a:p>
@@ -8406,7 +8412,7 @@
                 <a:ea typeface="Calibri" pitchFamily="34" charset="-122"/>
                 <a:cs typeface="Calibri" pitchFamily="34" charset="-120"/>
               </a:rPr>
-              <a:t>42 corner cases</a:t>
+              <a:t>13 · 8 · 11 · 12 controls</a:t>
             </a:r>
             <a:endParaRPr lang="en-US" sz="1300" dirty="0"/>
           </a:p>
@@ -8511,7 +8517,7 @@
                 <a:ea typeface="Calibri" pitchFamily="34" charset="-122"/>
                 <a:cs typeface="Calibri" pitchFamily="34" charset="-120"/>
               </a:rPr>
-              <a:t>SEC · LOG · SVC</a:t>
+              <a:t>MA · RS · IB · SC · CP</a:t>
             </a:r>
             <a:endParaRPr lang="en-US" sz="1300" dirty="0"/>
           </a:p>
@@ -8528,7 +8534,7 @@
                 <a:ea typeface="Calibri" pitchFamily="34" charset="-122"/>
                 <a:cs typeface="Calibri" pitchFamily="34" charset="-120"/>
               </a:rPr>
-              <a:t>13 · 8 · 11 controls</a:t>
+              <a:t>12 · 52 · 51 · 22 · 20 rules</a:t>
             </a:r>
             <a:endParaRPr lang="en-US" sz="1300" dirty="0"/>
           </a:p>
@@ -8650,7 +8656,7 @@
                 <a:ea typeface="Calibri" pitchFamily="34" charset="-122"/>
                 <a:cs typeface="Calibri" pitchFamily="34" charset="-120"/>
               </a:rPr>
-              <a:t>11 guardrails · 4 hooks</a:t>
+              <a:t>12 guardrails · 5 hooks</a:t>
             </a:r>
             <a:endParaRPr lang="en-US" sz="1300" dirty="0"/>
           </a:p>
@@ -10768,7 +10774,7 @@
                 <a:ea typeface="Calibri" pitchFamily="34" charset="-122"/>
                 <a:cs typeface="Calibri" pitchFamily="34" charset="-120"/>
               </a:rPr>
-              <a:t>SQL Server → Aurora PostgreSQL</a:t>
+              <a:t>SQL Server → Aurora PostgreSQL · reports · Informatica</a:t>
             </a:r>
             <a:endParaRPr lang="en-US" sz="1300" dirty="0"/>
           </a:p>
@@ -10785,7 +10791,7 @@
                 <a:ea typeface="Calibri" pitchFamily="34" charset="-122"/>
                 <a:cs typeface="Calibri" pitchFamily="34" charset="-120"/>
               </a:rPr>
-              <a:t>stored procedures, functions, triggers, DDL</a:t>
+              <a:t>procedures, functions, triggers, DDL · 15 report patterns · PowerCenter XML</a:t>
             </a:r>
             <a:endParaRPr lang="en-US" sz="1300" dirty="0"/>
           </a:p>
@@ -10858,7 +10864,7 @@
                 <a:ea typeface="Calibri" pitchFamily="34" charset="-122"/>
                 <a:cs typeface="Calibri" pitchFamily="34" charset="-120"/>
               </a:rPr>
-              <a:t>Reporting &amp; analytics SQL</a:t>
+              <a:t>Assessment + Redshift + Iceberg on S3</a:t>
             </a:r>
             <a:endParaRPr lang="en-US" sz="1300" dirty="0"/>
           </a:p>
@@ -10875,7 +10881,7 @@
                 <a:ea typeface="Calibri" pitchFamily="34" charset="-122"/>
                 <a:cs typeface="Calibri" pitchFamily="34" charset="-120"/>
               </a:rPr>
-              <a:t>15 patterns · 24 correctness rules</a:t>
+              <a:t>placement (M2RVE), warehouse DDL/views/procedures, lake tables, Athena views, Glue jobs</a:t>
             </a:r>
             <a:endParaRPr lang="en-US" sz="1300" dirty="0"/>
           </a:p>
@@ -10948,7 +10954,7 @@
                 <a:ea typeface="Calibri" pitchFamily="34" charset="-122"/>
                 <a:cs typeface="Calibri" pitchFamily="34" charset="-120"/>
               </a:rPr>
-              <a:t>Informatica ETL + SQL Server SQL → PostgreSQL</a:t>
+              <a:t>Schema conformance + change propagation</a:t>
             </a:r>
             <a:endParaRPr lang="en-US" sz="1300" dirty="0"/>
           </a:p>
@@ -10965,7 +10971,7 @@
                 <a:ea typeface="Calibri" pitchFamily="34" charset="-122"/>
                 <a:cs typeface="Calibri" pitchFamily="34" charset="-120"/>
               </a:rPr>
-              <a:t>real export format, lineage</a:t>
+              <a:t>hashed snapshots, per-column classification, cast-before-rename dry-run packages</a:t>
             </a:r>
             <a:endParaRPr lang="en-US" sz="1300" dirty="0"/>
           </a:p>
@@ -11102,7 +11108,7 @@
                 <a:ea typeface="Calibri" pitchFamily="34" charset="-122"/>
                 <a:cs typeface="Calibri" pitchFamily="34" charset="-120"/>
               </a:rPr>
-              <a:t>Schema mismatch detection</a:t>
+              <a:t>Data validation at a snapshot</a:t>
             </a:r>
             <a:endParaRPr lang="en-US" sz="1300" dirty="0"/>
           </a:p>
@@ -11119,7 +11125,7 @@
                 <a:ea typeface="Calibri" pitchFamily="34" charset="-122"/>
                 <a:cs typeface="Calibri" pitchFamily="34" charset="-120"/>
               </a:rPr>
-              <a:t>source ↔ target: tables, columns, types, nullability, keys, collation</a:t>
+              <a:t>row counts, key sets, checksums, sample diffs on all targets (V-012…V-021 executed)</a:t>
             </a:r>
             <a:endParaRPr lang="en-US" sz="1300" dirty="0"/>
           </a:p>
@@ -11192,7 +11198,7 @@
                 <a:ea typeface="Calibri" pitchFamily="34" charset="-122"/>
                 <a:cs typeface="Calibri" pitchFamily="34" charset="-120"/>
               </a:rPr>
-              <a:t>Schema change tracking</a:t>
+              <a:t>Serving paths</a:t>
             </a:r>
             <a:endParaRPr lang="en-US" sz="1300" dirty="0"/>
           </a:p>
@@ -11209,7 +11215,7 @@
                 <a:ea typeface="Calibri" pitchFamily="34" charset="-122"/>
                 <a:cs typeface="Calibri" pitchFamily="34" charset="-120"/>
               </a:rPr>
-              <a:t>DDL drift over time; flags affected converted objects and tests</a:t>
+              <a:t>Redshift Spectrum / managed Iceberg tables; Glue Data Catalog multi-dialect views</a:t>
             </a:r>
             <a:endParaRPr lang="en-US" sz="1300" dirty="0"/>
           </a:p>
@@ -11282,7 +11288,7 @@
                 <a:ea typeface="Calibri" pitchFamily="34" charset="-122"/>
                 <a:cs typeface="Calibri" pitchFamily="34" charset="-120"/>
               </a:rPr>
-              <a:t>Metadata &amp; data validation</a:t>
+              <a:t>AI-DLC integration (placeholder)</a:t>
             </a:r>
             <a:endParaRPr lang="en-US" sz="1300" dirty="0"/>
           </a:p>
@@ -11299,7 +11305,7 @@
                 <a:ea typeface="Calibri" pitchFamily="34" charset="-122"/>
                 <a:cs typeface="Calibri" pitchFamily="34" charset="-120"/>
               </a:rPr>
-              <a:t>object inventory, row counts, checksums, sample diffs</a:t>
+              <a:t>gates and packages mapped to Inception / Construction / Operations; steering + package adapter</a:t>
             </a:r>
             <a:endParaRPr lang="en-US" sz="1300" dirty="0"/>
           </a:p>
@@ -11526,7 +11532,7 @@
                 <a:ea typeface="Calibri" pitchFamily="34" charset="-122"/>
                 <a:cs typeface="Calibri" pitchFamily="34" charset="-120"/>
               </a:rPr>
-              <a:t>SQL Server → Amazon Redshift</a:t>
+              <a:t>Informatica ETL → Redshift and Oracle</a:t>
             </a:r>
             <a:endParaRPr lang="en-US" sz="1300" dirty="0"/>
           </a:p>
@@ -11543,7 +11549,7 @@
                 <a:ea typeface="Calibri" pitchFamily="34" charset="-122"/>
                 <a:cs typeface="Calibri" pitchFamily="34" charset="-120"/>
               </a:rPr>
-              <a:t>procedures → Redshift stored procedures, reports, dist/sort keys</a:t>
+              <a:t>overrides and Pre/Post SQL per target; COPY / UNLOAD</a:t>
             </a:r>
             <a:endParaRPr lang="en-US" sz="1300" dirty="0"/>
           </a:p>
@@ -11616,7 +11622,7 @@
                 <a:ea typeface="Calibri" pitchFamily="34" charset="-122"/>
                 <a:cs typeface="Calibri" pitchFamily="34" charset="-120"/>
               </a:rPr>
-              <a:t>Informatica ETL → Oracle and Redshift</a:t>
+              <a:t>Live evidence on Redshift / Athena</a:t>
             </a:r>
             <a:endParaRPr lang="en-US" sz="1300" dirty="0"/>
           </a:p>
@@ -11633,7 +11639,7 @@
                 <a:ea typeface="Calibri" pitchFamily="34" charset="-122"/>
                 <a:cs typeface="Calibri" pitchFamily="34" charset="-120"/>
               </a:rPr>
-              <a:t>overrides and Pre/Post SQL per target; COPY / UNLOAD</a:t>
+              <a:t>once test workgroups and databases exist (never created by the kit)</a:t>
             </a:r>
             <a:endParaRPr lang="en-US" sz="1300" dirty="0"/>
           </a:p>
@@ -13749,7 +13755,7 @@
                 <a:ea typeface="Calibri" pitchFamily="34" charset="-122"/>
                 <a:cs typeface="Calibri" pitchFamily="34" charset="-120"/>
               </a:rPr>
-              <a:t>611 automated checks and a coverage gate on the real target database</a:t>
+              <a:t>674 automated checks and a coverage gate on the real target database</a:t>
             </a:r>
             <a:endParaRPr lang="en-US" sz="2000" dirty="0"/>
           </a:p>
@@ -14132,7 +14138,7 @@
                 <a:ea typeface="Calibri" pitchFamily="34" charset="-122"/>
                 <a:cs typeface="Calibri" pitchFamily="34" charset="-120"/>
               </a:rPr>
-              <a:t>Three migration workstreams, one method: convert faithfully, prove on a real database, record everything</a:t>
+              <a:t>Three workstreams and three targets (Aurora · Redshift · Iceberg on S3), one method: convert faithfully, prove it, record everything</a:t>
             </a:r>
             <a:endParaRPr lang="en-US" sz="1500" dirty="0"/>
           </a:p>
@@ -23322,8 +23328,8 @@
         </p:nvSpPr>
         <p:spPr>
           <a:xfrm>
-            <a:off x="548640" y="5943600"/>
-            <a:ext cx="2377440" cy="310896"/>
+            <a:off x="548640" y="5897880"/>
+            <a:ext cx="2148840" cy="310896"/>
           </a:xfrm>
           <a:prstGeom prst="roundRect">
             <a:avLst>
@@ -23331,11 +23337,11 @@
             </a:avLst>
           </a:prstGeom>
           <a:solidFill>
-            <a:srgbClr val="E8F1F3"/>
+            <a:srgbClr val="124E5E"/>
           </a:solidFill>
           <a:ln w="12700">
             <a:solidFill>
-              <a:srgbClr val="E8F1F3"/>
+              <a:srgbClr val="124E5E"/>
             </a:solidFill>
             <a:prstDash val="solid"/>
           </a:ln>
@@ -23349,8 +23355,8 @@
         </p:nvSpPr>
         <p:spPr>
           <a:xfrm>
-            <a:off x="548640" y="5943600"/>
-            <a:ext cx="2377440" cy="310896"/>
+            <a:off x="548640" y="5897880"/>
+            <a:ext cx="2148840" cy="310896"/>
           </a:xfrm>
           <a:prstGeom prst="rect">
             <a:avLst/>
@@ -23366,17 +23372,17 @@
               <a:buNone/>
             </a:pPr>
             <a:r>
-              <a:rPr lang="en-US" sz="1100" dirty="0">
-                <a:solidFill>
-                  <a:srgbClr val="0B2E3A"/>
-                </a:solidFill>
-                <a:latin typeface="Calibri" pitchFamily="34" charset="0"/>
-                <a:ea typeface="Calibri" pitchFamily="34" charset="-122"/>
-                <a:cs typeface="Calibri" pitchFamily="34" charset="-120"/>
-              </a:rPr>
-              <a:t>planned: schema-validation</a:t>
-            </a:r>
-            <a:endParaRPr lang="en-US" sz="1100" dirty="0"/>
+              <a:rPr lang="en-US" sz="1050" dirty="0">
+                <a:solidFill>
+                  <a:srgbClr val="FFFFFF"/>
+                </a:solidFill>
+                <a:latin typeface="Calibri" pitchFamily="34" charset="0"/>
+                <a:ea typeface="Calibri" pitchFamily="34" charset="-122"/>
+                <a:cs typeface="Calibri" pitchFamily="34" charset="-120"/>
+              </a:rPr>
+              <a:t>migration-assessment · MA-12</a:t>
+            </a:r>
+            <a:endParaRPr lang="en-US" sz="1050" dirty="0"/>
           </a:p>
         </p:txBody>
       </p:sp>
@@ -23388,8 +23394,8 @@
         </p:nvSpPr>
         <p:spPr>
           <a:xfrm>
-            <a:off x="3063240" y="5943600"/>
-            <a:ext cx="2560320" cy="310896"/>
+            <a:off x="2788920" y="5897880"/>
+            <a:ext cx="2148840" cy="310896"/>
           </a:xfrm>
           <a:prstGeom prst="roundRect">
             <a:avLst>
@@ -23397,11 +23403,11 @@
             </a:avLst>
           </a:prstGeom>
           <a:solidFill>
-            <a:srgbClr val="E8F1F3"/>
+            <a:srgbClr val="124E5E"/>
           </a:solidFill>
           <a:ln w="12700">
             <a:solidFill>
-              <a:srgbClr val="E8F1F3"/>
+              <a:srgbClr val="124E5E"/>
             </a:solidFill>
             <a:prstDash val="solid"/>
           </a:ln>
@@ -23415,8 +23421,8 @@
         </p:nvSpPr>
         <p:spPr>
           <a:xfrm>
-            <a:off x="3063240" y="5943600"/>
-            <a:ext cx="2560320" cy="310896"/>
+            <a:off x="2788920" y="5897880"/>
+            <a:ext cx="2148840" cy="310896"/>
           </a:xfrm>
           <a:prstGeom prst="rect">
             <a:avLst/>
@@ -23432,30 +23438,57 @@
               <a:buNone/>
             </a:pPr>
             <a:r>
-              <a:rPr lang="en-US" sz="1100" dirty="0">
-                <a:solidFill>
-                  <a:srgbClr val="0B2E3A"/>
-                </a:solidFill>
-                <a:latin typeface="Calibri" pitchFamily="34" charset="0"/>
-                <a:ea typeface="Calibri" pitchFamily="34" charset="-122"/>
-                <a:cs typeface="Calibri" pitchFamily="34" charset="-120"/>
-              </a:rPr>
-              <a:t>planned: metadata-validation</a:t>
-            </a:r>
-            <a:endParaRPr lang="en-US" sz="1100" dirty="0"/>
-          </a:p>
-        </p:txBody>
-      </p:sp>
-      <p:sp>
-        <p:nvSpPr>
-          <p:cNvPr id="38" name="Text 36"/>
-          <p:cNvSpPr txBox="1"/>
-          <p:nvPr/>
-        </p:nvSpPr>
-        <p:spPr>
-          <a:xfrm>
-            <a:off x="5852160" y="5943600"/>
-            <a:ext cx="5760720" cy="310896"/>
+              <a:rPr lang="en-US" sz="1050" dirty="0">
+                <a:solidFill>
+                  <a:srgbClr val="FFFFFF"/>
+                </a:solidFill>
+                <a:latin typeface="Calibri" pitchFamily="34" charset="0"/>
+                <a:ea typeface="Calibri" pitchFamily="34" charset="-122"/>
+                <a:cs typeface="Calibri" pitchFamily="34" charset="-120"/>
+              </a:rPr>
+              <a:t>sql-conversion-redshift · RS-52</a:t>
+            </a:r>
+            <a:endParaRPr lang="en-US" sz="1050" dirty="0"/>
+          </a:p>
+        </p:txBody>
+      </p:sp>
+      <p:sp>
+        <p:nvSpPr>
+          <p:cNvPr id="38" name="Shape 36"/>
+          <p:cNvSpPr/>
+          <p:nvPr/>
+        </p:nvSpPr>
+        <p:spPr>
+          <a:xfrm>
+            <a:off x="5029200" y="5897880"/>
+            <a:ext cx="2148840" cy="310896"/>
+          </a:xfrm>
+          <a:prstGeom prst="roundRect">
+            <a:avLst>
+              <a:gd name="adj" fmla="val 50000"/>
+            </a:avLst>
+          </a:prstGeom>
+          <a:solidFill>
+            <a:srgbClr val="124E5E"/>
+          </a:solidFill>
+          <a:ln w="12700">
+            <a:solidFill>
+              <a:srgbClr val="124E5E"/>
+            </a:solidFill>
+            <a:prstDash val="solid"/>
+          </a:ln>
+        </p:spPr>
+      </p:sp>
+      <p:sp>
+        <p:nvSpPr>
+          <p:cNvPr id="39" name="Text 37"/>
+          <p:cNvSpPr txBox="1"/>
+          <p:nvPr/>
+        </p:nvSpPr>
+        <p:spPr>
+          <a:xfrm>
+            <a:off x="5029200" y="5897880"/>
+            <a:ext cx="2148840" cy="310896"/>
           </a:xfrm>
           <a:prstGeom prst="rect">
             <a:avLst/>
@@ -23467,11 +23500,182 @@
           <a:bodyPr wrap="square" lIns="0" tIns="0" rIns="0" bIns="0" rtlCol="0" anchor="ctr"/>
           <a:lstStyle/>
           <a:p>
+            <a:pPr algn="ctr" indent="0" marL="0">
+              <a:buNone/>
+            </a:pPr>
+            <a:r>
+              <a:rPr lang="en-US" sz="1050" dirty="0">
+                <a:solidFill>
+                  <a:srgbClr val="FFFFFF"/>
+                </a:solidFill>
+                <a:latin typeface="Calibri" pitchFamily="34" charset="0"/>
+                <a:ea typeface="Calibri" pitchFamily="34" charset="-122"/>
+                <a:cs typeface="Calibri" pitchFamily="34" charset="-120"/>
+              </a:rPr>
+              <a:t>sql-conversion-iceberg · IB-51</a:t>
+            </a:r>
+            <a:endParaRPr lang="en-US" sz="1050" dirty="0"/>
+          </a:p>
+        </p:txBody>
+      </p:sp>
+      <p:sp>
+        <p:nvSpPr>
+          <p:cNvPr id="40" name="Shape 38"/>
+          <p:cNvSpPr/>
+          <p:nvPr/>
+        </p:nvSpPr>
+        <p:spPr>
+          <a:xfrm>
+            <a:off x="7269480" y="5897880"/>
+            <a:ext cx="2148840" cy="310896"/>
+          </a:xfrm>
+          <a:prstGeom prst="roundRect">
+            <a:avLst>
+              <a:gd name="adj" fmla="val 50000"/>
+            </a:avLst>
+          </a:prstGeom>
+          <a:solidFill>
+            <a:srgbClr val="124E5E"/>
+          </a:solidFill>
+          <a:ln w="12700">
+            <a:solidFill>
+              <a:srgbClr val="124E5E"/>
+            </a:solidFill>
+            <a:prstDash val="solid"/>
+          </a:ln>
+        </p:spPr>
+      </p:sp>
+      <p:sp>
+        <p:nvSpPr>
+          <p:cNvPr id="41" name="Text 39"/>
+          <p:cNvSpPr txBox="1"/>
+          <p:nvPr/>
+        </p:nvSpPr>
+        <p:spPr>
+          <a:xfrm>
+            <a:off x="7269480" y="5897880"/>
+            <a:ext cx="2148840" cy="310896"/>
+          </a:xfrm>
+          <a:prstGeom prst="rect">
+            <a:avLst/>
+          </a:prstGeom>
+          <a:noFill/>
+          <a:ln/>
+        </p:spPr>
+        <p:txBody>
+          <a:bodyPr wrap="square" lIns="0" tIns="0" rIns="0" bIns="0" rtlCol="0" anchor="ctr"/>
+          <a:lstStyle/>
+          <a:p>
+            <a:pPr algn="ctr" indent="0" marL="0">
+              <a:buNone/>
+            </a:pPr>
+            <a:r>
+              <a:rPr lang="en-US" sz="1050" dirty="0">
+                <a:solidFill>
+                  <a:srgbClr val="FFFFFF"/>
+                </a:solidFill>
+                <a:latin typeface="Calibri" pitchFamily="34" charset="0"/>
+                <a:ea typeface="Calibri" pitchFamily="34" charset="-122"/>
+                <a:cs typeface="Calibri" pitchFamily="34" charset="-120"/>
+              </a:rPr>
+              <a:t>schema-conformance · SC-22</a:t>
+            </a:r>
+            <a:endParaRPr lang="en-US" sz="1050" dirty="0"/>
+          </a:p>
+        </p:txBody>
+      </p:sp>
+      <p:sp>
+        <p:nvSpPr>
+          <p:cNvPr id="42" name="Shape 40"/>
+          <p:cNvSpPr/>
+          <p:nvPr/>
+        </p:nvSpPr>
+        <p:spPr>
+          <a:xfrm>
+            <a:off x="9509760" y="5897880"/>
+            <a:ext cx="2148840" cy="310896"/>
+          </a:xfrm>
+          <a:prstGeom prst="roundRect">
+            <a:avLst>
+              <a:gd name="adj" fmla="val 50000"/>
+            </a:avLst>
+          </a:prstGeom>
+          <a:solidFill>
+            <a:srgbClr val="124E5E"/>
+          </a:solidFill>
+          <a:ln w="12700">
+            <a:solidFill>
+              <a:srgbClr val="124E5E"/>
+            </a:solidFill>
+            <a:prstDash val="solid"/>
+          </a:ln>
+        </p:spPr>
+      </p:sp>
+      <p:sp>
+        <p:nvSpPr>
+          <p:cNvPr id="43" name="Text 41"/>
+          <p:cNvSpPr txBox="1"/>
+          <p:nvPr/>
+        </p:nvSpPr>
+        <p:spPr>
+          <a:xfrm>
+            <a:off x="9509760" y="5897880"/>
+            <a:ext cx="2148840" cy="310896"/>
+          </a:xfrm>
+          <a:prstGeom prst="rect">
+            <a:avLst/>
+          </a:prstGeom>
+          <a:noFill/>
+          <a:ln/>
+        </p:spPr>
+        <p:txBody>
+          <a:bodyPr wrap="square" lIns="0" tIns="0" rIns="0" bIns="0" rtlCol="0" anchor="ctr"/>
+          <a:lstStyle/>
+          <a:p>
+            <a:pPr algn="ctr" indent="0" marL="0">
+              <a:buNone/>
+            </a:pPr>
+            <a:r>
+              <a:rPr lang="en-US" sz="1050" dirty="0">
+                <a:solidFill>
+                  <a:srgbClr val="FFFFFF"/>
+                </a:solidFill>
+                <a:latin typeface="Calibri" pitchFamily="34" charset="0"/>
+                <a:ea typeface="Calibri" pitchFamily="34" charset="-122"/>
+                <a:cs typeface="Calibri" pitchFamily="34" charset="-120"/>
+              </a:rPr>
+              <a:t>schema-change-propagation · CP-20</a:t>
+            </a:r>
+            <a:endParaRPr lang="en-US" sz="1050" dirty="0"/>
+          </a:p>
+        </p:txBody>
+      </p:sp>
+      <p:sp>
+        <p:nvSpPr>
+          <p:cNvPr id="44" name="Text 42"/>
+          <p:cNvSpPr txBox="1"/>
+          <p:nvPr/>
+        </p:nvSpPr>
+        <p:spPr>
+          <a:xfrm>
+            <a:off x="548640" y="6263640"/>
+            <a:ext cx="11064240" cy="274320"/>
+          </a:xfrm>
+          <a:prstGeom prst="rect">
+            <a:avLst/>
+          </a:prstGeom>
+          <a:noFill/>
+          <a:ln/>
+        </p:spPr>
+        <p:txBody>
+          <a:bodyPr wrap="square" lIns="0" tIns="0" rIns="0" bIns="0" rtlCol="0" anchor="ctr"/>
+          <a:lstStyle/>
+          <a:p>
             <a:pPr indent="0" marL="0">
               <a:buNone/>
             </a:pPr>
             <a:r>
-              <a:rPr lang="en-US" sz="1200" dirty="0">
+              <a:rPr lang="en-US" sz="1050" dirty="0">
                 <a:solidFill>
                   <a:srgbClr val="5B6B70"/>
                 </a:solidFill>
@@ -23479,15 +23683,15 @@
                 <a:ea typeface="Calibri" pitchFamily="34" charset="-122"/>
                 <a:cs typeface="Calibri" pitchFamily="34" charset="-120"/>
               </a:rPr>
-              <a:t>Kiro loads a skill when the request matches its description, or on /skill-name.</a:t>
-            </a:r>
-            <a:endParaRPr lang="en-US" sz="1200" dirty="0"/>
-          </a:p>
-        </p:txBody>
-      </p:sp>
-      <p:sp>
-        <p:nvSpPr>
-          <p:cNvPr id="39" name="Text 37"/>
+              <a:t>+ five skills (Sept 2026) on the same engine: assessment, Redshift, Iceberg on S3, schema conformance, change propagation. Kiro loads a skill when the request matches its description, or on /skill-name.</a:t>
+            </a:r>
+            <a:endParaRPr lang="en-US" sz="1050" dirty="0"/>
+          </a:p>
+        </p:txBody>
+      </p:sp>
+      <p:sp>
+        <p:nvSpPr>
+          <p:cNvPr id="45" name="Text 43"/>
           <p:cNvSpPr txBox="1"/>
           <p:nvPr/>
         </p:nvSpPr>

--- a/docs/Executive_Overview.pptx
+++ b/docs/Executive_Overview.pptx
@@ -222,7 +222,7 @@
                     <c:v>sql-conversion (SQL)</c:v>
                   </c:pt>
                   <c:pt idx="2">
-                    <c:v>sql-reporting (SQL)</c:v>
+                    <c:v>sql-reporting (SQL + dialects)</c:v>
                   </c:pt>
                   <c:pt idx="3">
                     <c:v>Informatica (SQL)</c:v>
@@ -237,7 +237,7 @@
                     <c:v>Assessment · Redshift · Iceberg · schema · change (unit)</c:v>
                   </c:pt>
                   <c:pt idx="7">
-                    <c:v>Agent hooks</c:v>
+                    <c:v>Hooks · agents · MCP</c:v>
                   </c:pt>
                 </c:lvl>
               </c:multiLvlStrCache>
@@ -256,7 +256,7 @@
                   <c:v>257</c:v>
                 </c:pt>
                 <c:pt idx="2">
-                  <c:v>88</c:v>
+                  <c:v>93</c:v>
                 </c:pt>
                 <c:pt idx="3">
                   <c:v>38</c:v>
@@ -265,13 +265,13 @@
                   <c:v>41</c:v>
                 </c:pt>
                 <c:pt idx="5">
-                  <c:v>27</c:v>
+                  <c:v>29</c:v>
                 </c:pt>
                 <c:pt idx="6">
                   <c:v>52</c:v>
                 </c:pt>
                 <c:pt idx="7">
-                  <c:v>18</c:v>
+                  <c:v>30</c:v>
                 </c:pt>
               </c:numCache>
             </c:numRef>
@@ -7952,7 +7952,7 @@
                 <a:ea typeface="Cambria" pitchFamily="34" charset="-122"/>
                 <a:cs typeface="Cambria" pitchFamily="34" charset="-120"/>
               </a:rPr>
-              <a:t>Proof: 674 automated checks, one gate</a:t>
+              <a:t>Proof: 693 automated checks, one gate</a:t>
             </a:r>
             <a:endParaRPr lang="en-US" sz="3200" dirty="0"/>
           </a:p>
@@ -8639,7 +8639,7 @@
                 <a:ea typeface="Calibri" pitchFamily="34" charset="-122"/>
                 <a:cs typeface="Calibri" pitchFamily="34" charset="-120"/>
               </a:rPr>
-              <a:t>GRD · HOOK</a:t>
+              <a:t>GRD · HOOK · AG · MCP</a:t>
             </a:r>
             <a:endParaRPr lang="en-US" sz="1300" dirty="0"/>
           </a:p>
@@ -8656,7 +8656,7 @@
                 <a:ea typeface="Calibri" pitchFamily="34" charset="-122"/>
                 <a:cs typeface="Calibri" pitchFamily="34" charset="-120"/>
               </a:rPr>
-              <a:t>12 guardrails · 5 hooks</a:t>
+              <a:t>12 guardrails · 5 hooks · 8 agent rules · 4 MCP rules</a:t>
             </a:r>
             <a:endParaRPr lang="en-US" sz="1300" dirty="0"/>
           </a:p>
@@ -11288,7 +11288,7 @@
                 <a:ea typeface="Calibri" pitchFamily="34" charset="-122"/>
                 <a:cs typeface="Calibri" pitchFamily="34" charset="-120"/>
               </a:rPr>
-              <a:t>AI-DLC integration (placeholder)</a:t>
+              <a:t>MCP + AI-DLC (placeholders started)</a:t>
             </a:r>
             <a:endParaRPr lang="en-US" sz="1300" dirty="0"/>
           </a:p>
@@ -11305,7 +11305,7 @@
                 <a:ea typeface="Calibri" pitchFamily="34" charset="-122"/>
                 <a:cs typeface="Calibri" pitchFamily="34" charset="-120"/>
               </a:rPr>
-              <a:t>gates and packages mapped to Inception / Construction / Operations; steering + package adapter</a:t>
+              <a:t>kit MCP server serves the read-only tools today; gates and packages mapped to AI-DLC phases next</a:t>
             </a:r>
             <a:endParaRPr lang="en-US" sz="1300" dirty="0"/>
           </a:p>
@@ -13755,7 +13755,7 @@
                 <a:ea typeface="Calibri" pitchFamily="34" charset="-122"/>
                 <a:cs typeface="Calibri" pitchFamily="34" charset="-120"/>
               </a:rPr>
-              <a:t>674 automated checks and a coverage gate on the real target database</a:t>
+              <a:t>693 automated checks and a coverage gate on the real target database</a:t>
             </a:r>
             <a:endParaRPr lang="en-US" sz="2000" dirty="0"/>
           </a:p>
@@ -23793,7 +23793,7 @@
                 <a:ea typeface="Cambria" pitchFamily="34" charset="-122"/>
                 <a:cs typeface="Cambria" pitchFamily="34" charset="-120"/>
               </a:rPr>
-              <a:t>How the agent works a request</a:t>
+              <a:t>How the agents work a request</a:t>
             </a:r>
             <a:endParaRPr lang="en-US" sz="3200" dirty="0"/>
           </a:p>
@@ -23832,7 +23832,7 @@
                 <a:ea typeface="Calibri" pitchFamily="34" charset="-122"/>
                 <a:cs typeface="Calibri" pitchFamily="34" charset="-120"/>
               </a:rPr>
-              <a:t>The model converts; tools, tests and hooks decide what is allowed and what counts as done</a:t>
+              <a:t>Two agents — conversion and reporting — same method: the model writes; tools, tests and hooks decide what is allowed and what counts as done</a:t>
             </a:r>
             <a:endParaRPr lang="en-US" sz="1500" dirty="0"/>
           </a:p>

--- a/docs/Executive_Overview.pptx
+++ b/docs/Executive_Overview.pptx
@@ -271,7 +271,7 @@
                   <c:v>52</c:v>
                 </c:pt>
                 <c:pt idx="7">
-                  <c:v>30</c:v>
+                  <c:v>31</c:v>
                 </c:pt>
               </c:numCache>
             </c:numRef>
@@ -7952,7 +7952,7 @@
                 <a:ea typeface="Cambria" pitchFamily="34" charset="-122"/>
                 <a:cs typeface="Cambria" pitchFamily="34" charset="-120"/>
               </a:rPr>
-              <a:t>Proof: 693 automated checks, one gate</a:t>
+              <a:t>Proof: 694 automated checks, one gate</a:t>
             </a:r>
             <a:endParaRPr lang="en-US" sz="3200" dirty="0"/>
           </a:p>
@@ -8656,7 +8656,7 @@
                 <a:ea typeface="Calibri" pitchFamily="34" charset="-122"/>
                 <a:cs typeface="Calibri" pitchFamily="34" charset="-120"/>
               </a:rPr>
-              <a:t>12 guardrails · 5 hooks · 8 agent rules · 4 MCP rules</a:t>
+              <a:t>12 guardrails · 6 hooks · 8 agent rules · 4 MCP rules</a:t>
             </a:r>
             <a:endParaRPr lang="en-US" sz="1300" dirty="0"/>
           </a:p>
@@ -13755,7 +13755,7 @@
                 <a:ea typeface="Calibri" pitchFamily="34" charset="-122"/>
                 <a:cs typeface="Calibri" pitchFamily="34" charset="-120"/>
               </a:rPr>
-              <a:t>693 automated checks and a coverage gate on the real target database</a:t>
+              <a:t>694 automated checks and a coverage gate on the real target database</a:t>
             </a:r>
             <a:endParaRPr lang="en-US" sz="2000" dirty="0"/>
           </a:p>
